--- a/Slides/How to think in code_02022026.pptx
+++ b/Slides/How to think in code_02022026.pptx
@@ -5,7 +5,7 @@
     <p:sldMasterId id="2147483660" r:id="rId1"/>
   </p:sldMasterIdLst>
   <p:notesMasterIdLst>
-    <p:notesMasterId r:id="rId101"/>
+    <p:notesMasterId r:id="rId100"/>
   </p:notesMasterIdLst>
   <p:sldIdLst>
     <p:sldId id="316" r:id="rId2"/>
@@ -106,7 +106,6 @@
     <p:sldId id="439" r:id="rId97"/>
     <p:sldId id="440" r:id="rId98"/>
     <p:sldId id="353" r:id="rId99"/>
-    <p:sldId id="318" r:id="rId100"/>
   </p:sldIdLst>
   <p:sldSz cx="9144000" cy="6858000" type="screen4x3"/>
   <p:notesSz cx="6858000" cy="9144000"/>
@@ -213,6 +212,27 @@
 </p:presentation>
 </file>
 
+<file path=ppt/changesInfos/changesInfo1.xml><?xml version="1.0" encoding="utf-8"?>
+<pc:chgInfo xmlns:a="http://schemas.openxmlformats.org/drawingml/2006/main" xmlns:r="http://schemas.openxmlformats.org/officeDocument/2006/relationships" xmlns:ac="http://schemas.microsoft.com/office/drawing/2013/main/command" xmlns:pc="http://schemas.microsoft.com/office/powerpoint/2013/main/command">
+  <pc:docChgLst>
+    <pc:chgData name="Maria Haddad" userId="6e068d50-389e-4856-bf60-dac2248ee013" providerId="ADAL" clId="{AA6CD518-27B7-4815-AC5F-128138CE7CD7}"/>
+    <pc:docChg chg="delSld">
+      <pc:chgData name="Maria Haddad" userId="6e068d50-389e-4856-bf60-dac2248ee013" providerId="ADAL" clId="{AA6CD518-27B7-4815-AC5F-128138CE7CD7}" dt="2026-01-30T00:07:07.699" v="0" actId="47"/>
+      <pc:docMkLst>
+        <pc:docMk/>
+      </pc:docMkLst>
+      <pc:sldChg chg="del">
+        <pc:chgData name="Maria Haddad" userId="6e068d50-389e-4856-bf60-dac2248ee013" providerId="ADAL" clId="{AA6CD518-27B7-4815-AC5F-128138CE7CD7}" dt="2026-01-30T00:07:07.699" v="0" actId="47"/>
+        <pc:sldMkLst>
+          <pc:docMk/>
+          <pc:sldMk cId="25426801" sldId="318"/>
+        </pc:sldMkLst>
+      </pc:sldChg>
+    </pc:docChg>
+  </pc:docChgLst>
+</pc:chgInfo>
+</file>
+
 <file path=ppt/notesMasters/notesMaster1.xml><?xml version="1.0" encoding="utf-8"?>
 <p:notesMaster xmlns:a="http://schemas.openxmlformats.org/drawingml/2006/main" xmlns:r="http://schemas.openxmlformats.org/officeDocument/2006/relationships" xmlns:p="http://schemas.openxmlformats.org/presentationml/2006/main">
   <p:cSld>
@@ -295,7 +315,7 @@
           <a:p>
             <a:fld id="{217E5156-1B5D-054E-B5B2-E1B1BA160252}" type="datetimeFigureOut">
               <a:rPr lang="fr-FR" smtClean="0"/>
-              <a:t>28/01/2026</a:t>
+              <a:t>29/01/2026</a:t>
             </a:fld>
             <a:endParaRPr lang="fr-FR"/>
           </a:p>
@@ -33489,649 +33509,6 @@
     <p:extLst>
       <p:ext uri="{BB962C8B-B14F-4D97-AF65-F5344CB8AC3E}">
         <p14:creationId xmlns:p14="http://schemas.microsoft.com/office/powerpoint/2010/main" val="2971605732"/>
-      </p:ext>
-    </p:extLst>
-  </p:cSld>
-  <p:clrMapOvr>
-    <a:masterClrMapping/>
-  </p:clrMapOvr>
-</p:sld>
-</file>
-
-<file path=ppt/slides/slide99.xml><?xml version="1.0" encoding="utf-8"?>
-<p:sld xmlns:a="http://schemas.openxmlformats.org/drawingml/2006/main" xmlns:r="http://schemas.openxmlformats.org/officeDocument/2006/relationships" xmlns:p="http://schemas.openxmlformats.org/presentationml/2006/main">
-  <p:cSld>
-    <p:spTree>
-      <p:nvGrpSpPr>
-        <p:cNvPr id="1" name=""/>
-        <p:cNvGrpSpPr/>
-        <p:nvPr/>
-      </p:nvGrpSpPr>
-      <p:grpSpPr>
-        <a:xfrm>
-          <a:off x="0" y="0"/>
-          <a:ext cx="0" cy="0"/>
-          <a:chOff x="0" y="0"/>
-          <a:chExt cx="0" cy="0"/>
-        </a:xfrm>
-      </p:grpSpPr>
-      <p:sp>
-        <p:nvSpPr>
-          <p:cNvPr id="2" name="Title 1">
-            <a:extLst>
-              <a:ext uri="{FF2B5EF4-FFF2-40B4-BE49-F238E27FC236}">
-                <a16:creationId xmlns:a16="http://schemas.microsoft.com/office/drawing/2014/main" id="{E03CDE7B-F6E0-3F35-CA16-9CBD538BDDC8}"/>
-              </a:ext>
-            </a:extLst>
-          </p:cNvPr>
-          <p:cNvSpPr>
-            <a:spLocks noGrp="1"/>
-          </p:cNvSpPr>
-          <p:nvPr>
-            <p:ph type="title"/>
-          </p:nvPr>
-        </p:nvSpPr>
-        <p:spPr/>
-        <p:txBody>
-          <a:bodyPr/>
-          <a:lstStyle/>
-          <a:p>
-            <a:pPr algn="ctr"/>
-            <a:r>
-              <a:rPr lang="en-CA" dirty="0">
-                <a:latin typeface="Helvetica" pitchFamily="2" charset="0"/>
-              </a:rPr>
-              <a:t>Thank you for attending!</a:t>
-            </a:r>
-          </a:p>
-        </p:txBody>
-      </p:sp>
-      <p:sp>
-        <p:nvSpPr>
-          <p:cNvPr id="4" name="TextBox 3">
-            <a:extLst>
-              <a:ext uri="{FF2B5EF4-FFF2-40B4-BE49-F238E27FC236}">
-                <a16:creationId xmlns:a16="http://schemas.microsoft.com/office/drawing/2014/main" id="{C55CD7EF-C880-CBCD-398D-7E3BB5D5062C}"/>
-              </a:ext>
-            </a:extLst>
-          </p:cNvPr>
-          <p:cNvSpPr txBox="1"/>
-          <p:nvPr/>
-        </p:nvSpPr>
-        <p:spPr>
-          <a:xfrm>
-            <a:off x="540553" y="5081109"/>
-            <a:ext cx="2236304" cy="830997"/>
-          </a:xfrm>
-          <a:prstGeom prst="rect">
-            <a:avLst/>
-          </a:prstGeom>
-          <a:noFill/>
-        </p:spPr>
-        <p:txBody>
-          <a:bodyPr wrap="square" rtlCol="0">
-            <a:spAutoFit/>
-          </a:bodyPr>
-          <a:lstStyle/>
-          <a:p>
-            <a:pPr marL="9525" lvl="1" algn="ctr"/>
-            <a:r>
-              <a:rPr lang="en-CA" sz="1600" dirty="0">
-                <a:latin typeface="Helvetica" pitchFamily="2" charset="0"/>
-              </a:rPr>
-              <a:t>Scan the QR code to confirm you attended today’s workshop.</a:t>
-            </a:r>
-          </a:p>
-        </p:txBody>
-      </p:sp>
-      <p:sp>
-        <p:nvSpPr>
-          <p:cNvPr id="6" name="TextBox 5">
-            <a:extLst>
-              <a:ext uri="{FF2B5EF4-FFF2-40B4-BE49-F238E27FC236}">
-                <a16:creationId xmlns:a16="http://schemas.microsoft.com/office/drawing/2014/main" id="{B779A3F8-F204-0C4B-8C60-EB9078FAF391}"/>
-              </a:ext>
-            </a:extLst>
-          </p:cNvPr>
-          <p:cNvSpPr txBox="1"/>
-          <p:nvPr/>
-        </p:nvSpPr>
-        <p:spPr>
-          <a:xfrm>
-            <a:off x="3555521" y="5087164"/>
-            <a:ext cx="1866473" cy="830997"/>
-          </a:xfrm>
-          <a:prstGeom prst="rect">
-            <a:avLst/>
-          </a:prstGeom>
-          <a:noFill/>
-        </p:spPr>
-        <p:txBody>
-          <a:bodyPr wrap="square">
-            <a:spAutoFit/>
-          </a:bodyPr>
-          <a:lstStyle/>
-          <a:p>
-            <a:pPr algn="ctr"/>
-            <a:r>
-              <a:rPr lang="en-CA" sz="1600" dirty="0">
-                <a:latin typeface="Helvetica" pitchFamily="2" charset="0"/>
-              </a:rPr>
-              <a:t>Fill out the feedback survey in the next 72h. </a:t>
-            </a:r>
-          </a:p>
-        </p:txBody>
-      </p:sp>
-      <p:sp>
-        <p:nvSpPr>
-          <p:cNvPr id="7" name="TextBox 6">
-            <a:extLst>
-              <a:ext uri="{FF2B5EF4-FFF2-40B4-BE49-F238E27FC236}">
-                <a16:creationId xmlns:a16="http://schemas.microsoft.com/office/drawing/2014/main" id="{5B857086-E9A2-1558-824A-80776B62AF2C}"/>
-              </a:ext>
-            </a:extLst>
-          </p:cNvPr>
-          <p:cNvSpPr txBox="1"/>
-          <p:nvPr/>
-        </p:nvSpPr>
-        <p:spPr>
-          <a:xfrm>
-            <a:off x="5970821" y="5081109"/>
-            <a:ext cx="2695988" cy="830997"/>
-          </a:xfrm>
-          <a:prstGeom prst="rect">
-            <a:avLst/>
-          </a:prstGeom>
-          <a:noFill/>
-        </p:spPr>
-        <p:txBody>
-          <a:bodyPr wrap="square">
-            <a:spAutoFit/>
-          </a:bodyPr>
-          <a:lstStyle/>
-          <a:p>
-            <a:pPr algn="ctr"/>
-            <a:r>
-              <a:rPr lang="en-CA" sz="1600" dirty="0">
-                <a:latin typeface="Helvetica" pitchFamily="2" charset="0"/>
-              </a:rPr>
-              <a:t>Get recognition for this workshop on your </a:t>
-            </a:r>
-          </a:p>
-          <a:p>
-            <a:pPr algn="ctr"/>
-            <a:r>
-              <a:rPr lang="en-CA" sz="1600" dirty="0">
-                <a:latin typeface="Helvetica" pitchFamily="2" charset="0"/>
-              </a:rPr>
-              <a:t>co-curricular record. </a:t>
-            </a:r>
-          </a:p>
-        </p:txBody>
-      </p:sp>
-      <p:sp>
-        <p:nvSpPr>
-          <p:cNvPr id="10" name="Oval 9">
-            <a:extLst>
-              <a:ext uri="{FF2B5EF4-FFF2-40B4-BE49-F238E27FC236}">
-                <a16:creationId xmlns:a16="http://schemas.microsoft.com/office/drawing/2014/main" id="{41CD90ED-F12C-DA32-1A84-EF0356FB7921}"/>
-              </a:ext>
-            </a:extLst>
-          </p:cNvPr>
-          <p:cNvSpPr>
-            <a:spLocks noChangeAspect="1"/>
-          </p:cNvSpPr>
-          <p:nvPr/>
-        </p:nvSpPr>
-        <p:spPr>
-          <a:xfrm>
-            <a:off x="1298705" y="1853639"/>
-            <a:ext cx="720000" cy="686283"/>
-          </a:xfrm>
-          <a:prstGeom prst="ellipse">
-            <a:avLst/>
-          </a:prstGeom>
-          <a:solidFill>
-            <a:srgbClr val="13A89E">
-              <a:alpha val="49412"/>
-            </a:srgbClr>
-          </a:solidFill>
-          <a:ln>
-            <a:noFill/>
-          </a:ln>
-        </p:spPr>
-        <p:style>
-          <a:lnRef idx="2">
-            <a:schemeClr val="accent1">
-              <a:shade val="15000"/>
-            </a:schemeClr>
-          </a:lnRef>
-          <a:fillRef idx="1">
-            <a:schemeClr val="accent1"/>
-          </a:fillRef>
-          <a:effectRef idx="0">
-            <a:schemeClr val="accent1"/>
-          </a:effectRef>
-          <a:fontRef idx="minor">
-            <a:schemeClr val="lt1"/>
-          </a:fontRef>
-        </p:style>
-        <p:txBody>
-          <a:bodyPr rtlCol="0" anchor="ctr"/>
-          <a:lstStyle/>
-          <a:p>
-            <a:pPr algn="ctr"/>
-            <a:r>
-              <a:rPr lang="en-US" dirty="0">
-                <a:latin typeface="Helvetica" pitchFamily="2" charset="0"/>
-              </a:rPr>
-              <a:t>1</a:t>
-            </a:r>
-          </a:p>
-        </p:txBody>
-      </p:sp>
-      <p:sp>
-        <p:nvSpPr>
-          <p:cNvPr id="11" name="Oval 10">
-            <a:extLst>
-              <a:ext uri="{FF2B5EF4-FFF2-40B4-BE49-F238E27FC236}">
-                <a16:creationId xmlns:a16="http://schemas.microsoft.com/office/drawing/2014/main" id="{1B79FEFC-04D4-EE23-8047-B09F61F389B0}"/>
-              </a:ext>
-            </a:extLst>
-          </p:cNvPr>
-          <p:cNvSpPr>
-            <a:spLocks noChangeAspect="1"/>
-          </p:cNvSpPr>
-          <p:nvPr/>
-        </p:nvSpPr>
-        <p:spPr>
-          <a:xfrm>
-            <a:off x="4128760" y="1853639"/>
-            <a:ext cx="720000" cy="686283"/>
-          </a:xfrm>
-          <a:prstGeom prst="ellipse">
-            <a:avLst/>
-          </a:prstGeom>
-          <a:solidFill>
-            <a:srgbClr val="13A89E">
-              <a:alpha val="74902"/>
-            </a:srgbClr>
-          </a:solidFill>
-          <a:ln>
-            <a:noFill/>
-          </a:ln>
-        </p:spPr>
-        <p:style>
-          <a:lnRef idx="2">
-            <a:schemeClr val="accent1">
-              <a:shade val="15000"/>
-            </a:schemeClr>
-          </a:lnRef>
-          <a:fillRef idx="1">
-            <a:schemeClr val="accent1"/>
-          </a:fillRef>
-          <a:effectRef idx="0">
-            <a:schemeClr val="accent1"/>
-          </a:effectRef>
-          <a:fontRef idx="minor">
-            <a:schemeClr val="lt1"/>
-          </a:fontRef>
-        </p:style>
-        <p:txBody>
-          <a:bodyPr rtlCol="0" anchor="ctr"/>
-          <a:lstStyle/>
-          <a:p>
-            <a:pPr algn="ctr"/>
-            <a:r>
-              <a:rPr lang="en-US" dirty="0">
-                <a:latin typeface="Helvetica" pitchFamily="2" charset="0"/>
-              </a:rPr>
-              <a:t>2</a:t>
-            </a:r>
-          </a:p>
-        </p:txBody>
-      </p:sp>
-      <p:sp>
-        <p:nvSpPr>
-          <p:cNvPr id="12" name="Oval 11">
-            <a:extLst>
-              <a:ext uri="{FF2B5EF4-FFF2-40B4-BE49-F238E27FC236}">
-                <a16:creationId xmlns:a16="http://schemas.microsoft.com/office/drawing/2014/main" id="{B755A2CE-36C7-7C3A-E3EF-94EBD356F86C}"/>
-              </a:ext>
-            </a:extLst>
-          </p:cNvPr>
-          <p:cNvSpPr>
-            <a:spLocks noChangeAspect="1"/>
-          </p:cNvSpPr>
-          <p:nvPr/>
-        </p:nvSpPr>
-        <p:spPr>
-          <a:xfrm>
-            <a:off x="6958815" y="1837130"/>
-            <a:ext cx="720000" cy="686283"/>
-          </a:xfrm>
-          <a:prstGeom prst="ellipse">
-            <a:avLst/>
-          </a:prstGeom>
-          <a:solidFill>
-            <a:srgbClr val="13A89E"/>
-          </a:solidFill>
-          <a:ln>
-            <a:noFill/>
-          </a:ln>
-        </p:spPr>
-        <p:style>
-          <a:lnRef idx="2">
-            <a:schemeClr val="accent1">
-              <a:shade val="15000"/>
-            </a:schemeClr>
-          </a:lnRef>
-          <a:fillRef idx="1">
-            <a:schemeClr val="accent1"/>
-          </a:fillRef>
-          <a:effectRef idx="0">
-            <a:schemeClr val="accent1"/>
-          </a:effectRef>
-          <a:fontRef idx="minor">
-            <a:schemeClr val="lt1"/>
-          </a:fontRef>
-        </p:style>
-        <p:txBody>
-          <a:bodyPr rtlCol="0" anchor="ctr"/>
-          <a:lstStyle/>
-          <a:p>
-            <a:pPr algn="ctr"/>
-            <a:r>
-              <a:rPr lang="en-US" dirty="0">
-                <a:latin typeface="Helvetica" pitchFamily="2" charset="0"/>
-              </a:rPr>
-              <a:t>3</a:t>
-            </a:r>
-          </a:p>
-        </p:txBody>
-      </p:sp>
-      <p:pic>
-        <p:nvPicPr>
-          <p:cNvPr id="14" name="Graphic 13" descr="Clipboard with solid fill">
-            <a:extLst>
-              <a:ext uri="{FF2B5EF4-FFF2-40B4-BE49-F238E27FC236}">
-                <a16:creationId xmlns:a16="http://schemas.microsoft.com/office/drawing/2014/main" id="{060FE140-39DA-6155-D659-8C3C8FEDECAE}"/>
-              </a:ext>
-            </a:extLst>
-          </p:cNvPr>
-          <p:cNvPicPr>
-            <a:picLocks noChangeAspect="1"/>
-          </p:cNvPicPr>
-          <p:nvPr/>
-        </p:nvPicPr>
-        <p:blipFill>
-          <a:blip r:embed="rId2">
-            <a:extLst>
-              <a:ext uri="{96DAC541-7B7A-43D3-8B79-37D633B846F1}">
-                <asvg:svgBlip xmlns:asvg="http://schemas.microsoft.com/office/drawing/2016/SVG/main" r:embed="rId3"/>
-              </a:ext>
-            </a:extLst>
-          </a:blip>
-          <a:stretch>
-            <a:fillRect/>
-          </a:stretch>
-        </p:blipFill>
-        <p:spPr>
-          <a:xfrm>
-            <a:off x="3555521" y="2880306"/>
-            <a:ext cx="1866473" cy="1866473"/>
-          </a:xfrm>
-          <a:prstGeom prst="rect">
-            <a:avLst/>
-          </a:prstGeom>
-        </p:spPr>
-      </p:pic>
-      <p:pic>
-        <p:nvPicPr>
-          <p:cNvPr id="1026" name="Picture 2" descr="Co-curricular record approval logo">
-            <a:extLst>
-              <a:ext uri="{FF2B5EF4-FFF2-40B4-BE49-F238E27FC236}">
-                <a16:creationId xmlns:a16="http://schemas.microsoft.com/office/drawing/2014/main" id="{B21C3CDD-B849-1F66-A5B6-38B78BCAB0B1}"/>
-              </a:ext>
-            </a:extLst>
-          </p:cNvPr>
-          <p:cNvPicPr>
-            <a:picLocks noChangeAspect="1" noChangeArrowheads="1"/>
-          </p:cNvPicPr>
-          <p:nvPr/>
-        </p:nvPicPr>
-        <p:blipFill>
-          <a:blip r:embed="rId4">
-            <a:extLst>
-              <a:ext uri="{28A0092B-C50C-407E-A947-70E740481C1C}">
-                <a14:useLocalDpi xmlns:a14="http://schemas.microsoft.com/office/drawing/2010/main" val="0"/>
-              </a:ext>
-            </a:extLst>
-          </a:blip>
-          <a:srcRect/>
-          <a:stretch>
-            <a:fillRect/>
-          </a:stretch>
-        </p:blipFill>
-        <p:spPr bwMode="auto">
-          <a:xfrm>
-            <a:off x="6302815" y="3051542"/>
-            <a:ext cx="2032000" cy="1524000"/>
-          </a:xfrm>
-          <a:prstGeom prst="rect">
-            <a:avLst/>
-          </a:prstGeom>
-          <a:noFill/>
-          <a:extLst>
-            <a:ext uri="{909E8E84-426E-40DD-AFC4-6F175D3DCCD1}">
-              <a14:hiddenFill xmlns:a14="http://schemas.microsoft.com/office/drawing/2010/main">
-                <a:solidFill>
-                  <a:srgbClr val="FFFFFF"/>
-                </a:solidFill>
-              </a14:hiddenFill>
-            </a:ext>
-          </a:extLst>
-        </p:spPr>
-      </p:pic>
-      <p:pic>
-        <p:nvPicPr>
-          <p:cNvPr id="3" name="Picture 2" descr="A close up of a sign&#10;&#10;Description automatically generated">
-            <a:extLst>
-              <a:ext uri="{FF2B5EF4-FFF2-40B4-BE49-F238E27FC236}">
-                <a16:creationId xmlns:a16="http://schemas.microsoft.com/office/drawing/2014/main" id="{715D5D0F-22C4-C938-7864-A4365EBD2A8D}"/>
-              </a:ext>
-            </a:extLst>
-          </p:cNvPr>
-          <p:cNvPicPr>
-            <a:picLocks noChangeAspect="1"/>
-          </p:cNvPicPr>
-          <p:nvPr/>
-        </p:nvPicPr>
-        <p:blipFill>
-          <a:blip r:embed="rId5"/>
-          <a:stretch>
-            <a:fillRect/>
-          </a:stretch>
-        </p:blipFill>
-        <p:spPr>
-          <a:xfrm>
-            <a:off x="6800850" y="6428034"/>
-            <a:ext cx="2343150" cy="298450"/>
-          </a:xfrm>
-          <a:prstGeom prst="rect">
-            <a:avLst/>
-          </a:prstGeom>
-        </p:spPr>
-      </p:pic>
-      <p:sp>
-        <p:nvSpPr>
-          <p:cNvPr id="13" name="AutoShape 2">
-            <a:extLst>
-              <a:ext uri="{FF2B5EF4-FFF2-40B4-BE49-F238E27FC236}">
-                <a16:creationId xmlns:a16="http://schemas.microsoft.com/office/drawing/2014/main" id="{74C21BD0-7E7C-7802-AA6E-1817E577ED7C}"/>
-              </a:ext>
-            </a:extLst>
-          </p:cNvPr>
-          <p:cNvSpPr>
-            <a:spLocks noChangeAspect="1" noChangeArrowheads="1"/>
-          </p:cNvSpPr>
-          <p:nvPr/>
-        </p:nvSpPr>
-        <p:spPr bwMode="auto">
-          <a:xfrm>
-            <a:off x="4419600" y="3276600"/>
-            <a:ext cx="304800" cy="304800"/>
-          </a:xfrm>
-          <a:prstGeom prst="rect">
-            <a:avLst/>
-          </a:prstGeom>
-          <a:noFill/>
-          <a:extLst>
-            <a:ext uri="{909E8E84-426E-40DD-AFC4-6F175D3DCCD1}">
-              <a14:hiddenFill xmlns:a14="http://schemas.microsoft.com/office/drawing/2010/main">
-                <a:solidFill>
-                  <a:srgbClr val="FFFFFF"/>
-                </a:solidFill>
-              </a14:hiddenFill>
-            </a:ext>
-          </a:extLst>
-        </p:spPr>
-        <p:txBody>
-          <a:bodyPr vert="horz" wrap="square" lIns="91440" tIns="45720" rIns="91440" bIns="45720" numCol="1" anchor="t" anchorCtr="0" compatLnSpc="1">
-            <a:prstTxWarp prst="textNoShape">
-              <a:avLst/>
-            </a:prstTxWarp>
-          </a:bodyPr>
-          <a:lstStyle/>
-          <a:p>
-            <a:endParaRPr lang="en-CA"/>
-          </a:p>
-        </p:txBody>
-      </p:sp>
-      <p:sp>
-        <p:nvSpPr>
-          <p:cNvPr id="17" name="AutoShape 8">
-            <a:extLst>
-              <a:ext uri="{FF2B5EF4-FFF2-40B4-BE49-F238E27FC236}">
-                <a16:creationId xmlns:a16="http://schemas.microsoft.com/office/drawing/2014/main" id="{300BE3E0-083D-B6C9-FCBC-A5354E488571}"/>
-              </a:ext>
-            </a:extLst>
-          </p:cNvPr>
-          <p:cNvSpPr>
-            <a:spLocks noChangeAspect="1" noChangeArrowheads="1"/>
-          </p:cNvSpPr>
-          <p:nvPr/>
-        </p:nvSpPr>
-        <p:spPr bwMode="auto">
-          <a:xfrm>
-            <a:off x="2674700" y="1531700"/>
-            <a:ext cx="2354500" cy="2354500"/>
-          </a:xfrm>
-          <a:prstGeom prst="rect">
-            <a:avLst/>
-          </a:prstGeom>
-          <a:noFill/>
-          <a:extLst>
-            <a:ext uri="{909E8E84-426E-40DD-AFC4-6F175D3DCCD1}">
-              <a14:hiddenFill xmlns:a14="http://schemas.microsoft.com/office/drawing/2010/main">
-                <a:solidFill>
-                  <a:srgbClr val="FFFFFF"/>
-                </a:solidFill>
-              </a14:hiddenFill>
-            </a:ext>
-          </a:extLst>
-        </p:spPr>
-        <p:txBody>
-          <a:bodyPr vert="horz" wrap="square" lIns="91440" tIns="45720" rIns="91440" bIns="45720" numCol="1" anchor="t" anchorCtr="0" compatLnSpc="1">
-            <a:prstTxWarp prst="textNoShape">
-              <a:avLst/>
-            </a:prstTxWarp>
-          </a:bodyPr>
-          <a:lstStyle/>
-          <a:p>
-            <a:endParaRPr lang="en-CA"/>
-          </a:p>
-        </p:txBody>
-      </p:sp>
-      <p:sp>
-        <p:nvSpPr>
-          <p:cNvPr id="5" name="AutoShape 2">
-            <a:extLst>
-              <a:ext uri="{FF2B5EF4-FFF2-40B4-BE49-F238E27FC236}">
-                <a16:creationId xmlns:a16="http://schemas.microsoft.com/office/drawing/2014/main" id="{4C69DE62-6465-71F4-1F1B-EAAC49E6F84A}"/>
-              </a:ext>
-            </a:extLst>
-          </p:cNvPr>
-          <p:cNvSpPr>
-            <a:spLocks noChangeAspect="1" noChangeArrowheads="1"/>
-          </p:cNvSpPr>
-          <p:nvPr/>
-        </p:nvSpPr>
-        <p:spPr bwMode="auto">
-          <a:xfrm>
-            <a:off x="4724400" y="3581400"/>
-            <a:ext cx="304800" cy="304800"/>
-          </a:xfrm>
-          <a:prstGeom prst="rect">
-            <a:avLst/>
-          </a:prstGeom>
-          <a:noFill/>
-          <a:extLst>
-            <a:ext uri="{909E8E84-426E-40DD-AFC4-6F175D3DCCD1}">
-              <a14:hiddenFill xmlns:a14="http://schemas.microsoft.com/office/drawing/2010/main">
-                <a:solidFill>
-                  <a:srgbClr val="FFFFFF"/>
-                </a:solidFill>
-              </a14:hiddenFill>
-            </a:ext>
-          </a:extLst>
-        </p:spPr>
-        <p:txBody>
-          <a:bodyPr vert="horz" wrap="square" lIns="91440" tIns="45720" rIns="91440" bIns="45720" numCol="1" anchor="t" anchorCtr="0" compatLnSpc="1">
-            <a:prstTxWarp prst="textNoShape">
-              <a:avLst/>
-            </a:prstTxWarp>
-          </a:bodyPr>
-          <a:lstStyle/>
-          <a:p>
-            <a:endParaRPr lang="en-CA"/>
-          </a:p>
-        </p:txBody>
-      </p:sp>
-      <p:pic>
-        <p:nvPicPr>
-          <p:cNvPr id="16" name="Picture 15" descr="A qr code with black squares&#10;&#10;AI-generated content may be incorrect.">
-            <a:extLst>
-              <a:ext uri="{FF2B5EF4-FFF2-40B4-BE49-F238E27FC236}">
-                <a16:creationId xmlns:a16="http://schemas.microsoft.com/office/drawing/2014/main" id="{A870B57E-C407-181B-33D8-77B78E7CD877}"/>
-              </a:ext>
-            </a:extLst>
-          </p:cNvPr>
-          <p:cNvPicPr>
-            <a:picLocks noChangeAspect="1"/>
-          </p:cNvPicPr>
-          <p:nvPr/>
-        </p:nvPicPr>
-        <p:blipFill>
-          <a:blip r:embed="rId6"/>
-          <a:stretch>
-            <a:fillRect/>
-          </a:stretch>
-        </p:blipFill>
-        <p:spPr>
-          <a:xfrm>
-            <a:off x="540553" y="2698277"/>
-            <a:ext cx="2354500" cy="2354500"/>
-          </a:xfrm>
-          <a:prstGeom prst="rect">
-            <a:avLst/>
-          </a:prstGeom>
-        </p:spPr>
-      </p:pic>
-    </p:spTree>
-    <p:extLst>
-      <p:ext uri="{BB962C8B-B14F-4D97-AF65-F5344CB8AC3E}">
-        <p14:creationId xmlns:p14="http://schemas.microsoft.com/office/powerpoint/2010/main" val="25426801"/>
       </p:ext>
     </p:extLst>
   </p:cSld>
